--- a/apresentacao/EdgeHealth_Apresentacao_Final.pptx
+++ b/apresentacao/EdgeHealth_Apresentacao_Final.pptx
@@ -1067,7 +1067,7 @@
           </a:p>
           <a:p>
             <a:r>
-              <a:t>Sobre qualidade: são 186 testes automatizados no backend e 20 no frontend, todos passando.</a:t>
+              <a:t>Sobre qualidade: são 187 testes automatizados no backend e 20 no frontend, todos passando.</a:t>
             </a:r>
           </a:p>
           <a:p>
@@ -9052,7 +9052,7 @@
                 </a:solidFill>
                 <a:latin typeface="Segoe UI"/>
               </a:rPr>
-              <a:t>186 testes no backend e 20 no frontend, todos passando.</a:t>
+              <a:t>187 testes no backend e 20 no frontend, todos passando.</a:t>
             </a:r>
           </a:p>
           <a:p>
